--- a/ai-engineering/07-inference-engineering/slides/inference-engineering.pptx
+++ b/ai-engineering/07-inference-engineering/slides/inference-engineering.pptx
@@ -13938,7 +13938,7 @@
         <p:spPr>
           <a:xfrm>
             <a:off x="502920" y="1472184"/>
-            <a:ext cx="6711513" cy="3611879"/>
+            <a:ext cx="6711513" cy="3368040"/>
           </a:xfrm>
           <a:prstGeom prst="roundRect">
             <a:avLst>
@@ -14023,7 +14023,7 @@
         <p:spPr>
           <a:xfrm>
             <a:off x="731520" y="1883664"/>
-            <a:ext cx="6254313" cy="2971799"/>
+            <a:ext cx="6254313" cy="2727959"/>
           </a:xfrm>
           <a:prstGeom prst="rect">
             <a:avLst/>
@@ -14048,7 +14048,7 @@
                 </a:solidFill>
                 <a:latin typeface="Menlo"/>
               </a:rPr>
-              <a:t># Decode: pre-allocate the KV cache so every step has one shape</a:t>
+              <a:t># Decode: fix the KV shape with a static cache</a:t>
             </a:r>
           </a:p>
           <a:p>
@@ -14064,7 +14064,7 @@
                 </a:solidFill>
                 <a:latin typeface="Menlo"/>
               </a:rPr>
-              <a:t>model.generation_config.cache_implementation = "static"</a:t>
+              <a:t>cfg = model.generation_config</a:t>
             </a:r>
           </a:p>
           <a:p>
@@ -14080,6 +14080,22 @@
                 </a:solidFill>
                 <a:latin typeface="Menlo"/>
               </a:rPr>
+              <a:t>cfg.cache_implementation = "static"</a:t>
+            </a:r>
+          </a:p>
+          <a:p>
+            <a:pPr algn="l">
+              <a:lnSpc>
+                <a:spcPct val="100000"/>
+              </a:lnSpc>
+            </a:pPr>
+            <a:r>
+              <a:rPr sz="1600" i="0" b="0">
+                <a:solidFill>
+                  <a:srgbClr val="E2E8F0"/>
+                </a:solidFill>
+                <a:latin typeface="Menlo"/>
+              </a:rPr>
               <a:t>model.forward = torch.compile(</a:t>
             </a:r>
           </a:p>
@@ -14096,7 +14112,7 @@
                 </a:solidFill>
                 <a:latin typeface="Menlo"/>
               </a:rPr>
-              <a:t>    model.forward, mode="reduce-overhead", fullgraph=True)</a:t>
+              <a:t>    model.forward,</a:t>
             </a:r>
           </a:p>
           <a:p>
@@ -14105,6 +14121,15 @@
                 <a:spcPct val="100000"/>
               </a:lnSpc>
             </a:pPr>
+            <a:r>
+              <a:rPr sz="1600" i="0" b="0">
+                <a:solidFill>
+                  <a:srgbClr val="E2E8F0"/>
+                </a:solidFill>
+                <a:latin typeface="Menlo"/>
+              </a:rPr>
+              <a:t>    mode="reduce-overhead",</a:t>
+            </a:r>
           </a:p>
           <a:p>
             <a:pPr algn="l">
@@ -14119,7 +14144,30 @@
                 </a:solidFill>
                 <a:latin typeface="Menlo"/>
               </a:rPr>
-              <a:t># CI: mark known-dynamic dims, then fail on any recompile</a:t>
+              <a:t>    fullgraph=True)</a:t>
+            </a:r>
+          </a:p>
+          <a:p>
+            <a:pPr algn="l">
+              <a:lnSpc>
+                <a:spcPct val="100000"/>
+              </a:lnSpc>
+            </a:pPr>
+          </a:p>
+          <a:p>
+            <a:pPr algn="l">
+              <a:lnSpc>
+                <a:spcPct val="100000"/>
+              </a:lnSpc>
+            </a:pPr>
+            <a:r>
+              <a:rPr sz="1600" i="0" b="0">
+                <a:solidFill>
+                  <a:srgbClr val="E2E8F0"/>
+                </a:solidFill>
+                <a:latin typeface="Menlo"/>
+              </a:rPr>
+              <a:t># CI: allow known dims, fail on any recompile</a:t>
             </a:r>
           </a:p>
           <a:p>
@@ -18198,7 +18246,7 @@
         <p:spPr>
           <a:xfrm>
             <a:off x="502920" y="1472184"/>
-            <a:ext cx="6711513" cy="3855720"/>
+            <a:ext cx="6711513" cy="2636520"/>
           </a:xfrm>
           <a:prstGeom prst="roundRect">
             <a:avLst>
@@ -18283,7 +18331,7 @@
         <p:spPr>
           <a:xfrm>
             <a:off x="731520" y="1883664"/>
-            <a:ext cx="6254313" cy="3215640"/>
+            <a:ext cx="6254313" cy="1996439"/>
           </a:xfrm>
           <a:prstGeom prst="rect">
             <a:avLst/>
@@ -18308,7 +18356,7 @@
                 </a:solidFill>
                 <a:latin typeface="Menlo"/>
               </a:rPr>
-              <a:t># Length-aware batching: prefill cost grows roughly N(N+1)/2</a:t>
+              <a:t># Length-aware: prefill cost ~ N(N+1)/2</a:t>
             </a:r>
           </a:p>
           <a:p>
@@ -18324,7 +18372,7 @@
                 </a:solidFill>
                 <a:latin typeface="Menlo"/>
               </a:rPr>
-              <a:t>prompts [6K, 2K, 6K, 2K, 2K, 2K] across two GPUs</a:t>
+              <a:t>[6K,2K,6K,2K,2K,2K] on two GPUs</a:t>
             </a:r>
           </a:p>
           <a:p>
@@ -18340,7 +18388,7 @@
                 </a:solidFill>
                 <a:latin typeface="Menlo"/>
               </a:rPr>
-              <a:t>both 6K on one GPU       critical path ~38.0M Q*K products</a:t>
+              <a:t>both 6K on one GPU: ~38.0M Q*K products</a:t>
             </a:r>
           </a:p>
           <a:p>
@@ -18356,7 +18404,7 @@
                 </a:solidFill>
                 <a:latin typeface="Menlo"/>
               </a:rPr>
-              <a:t>[2K, 2K, 6K] on each     critical path ~22.0M       42% less</a:t>
+              <a:t>[2K,2K,6K] on each: ~22.0M, 42% less</a:t>
             </a:r>
           </a:p>
           <a:p>
@@ -18379,7 +18427,7 @@
                 </a:solidFill>
                 <a:latin typeface="Menlo"/>
               </a:rPr>
-              <a:t># Cascade: 60% of queries go to a 10x smaller model</a:t>
+              <a:t># Cascade: 60% go to a 10x smaller model</a:t>
             </a:r>
           </a:p>
           <a:p>
@@ -18411,7 +18459,7 @@
                 </a:solidFill>
                 <a:latin typeface="Menlo"/>
               </a:rPr>
-              <a:t>about 2.2x cheaper     the book's claimed 5x does not hold</a:t>
+              <a:t>about 2.2x cheaper, not the book's claimed 5x</a:t>
             </a:r>
           </a:p>
         </p:txBody>
@@ -20280,7 +20328,7 @@
         <p:spPr>
           <a:xfrm>
             <a:off x="502920" y="1472184"/>
-            <a:ext cx="6711513" cy="3657600"/>
+            <a:ext cx="6711513" cy="3368040"/>
           </a:xfrm>
           <a:prstGeom prst="roundRect">
             <a:avLst>
@@ -20365,7 +20413,7 @@
         <p:spPr>
           <a:xfrm>
             <a:off x="731520" y="1883664"/>
-            <a:ext cx="6254313" cy="3017520"/>
+            <a:ext cx="6254313" cy="2727959"/>
           </a:xfrm>
           <a:prstGeom prst="rect">
             <a:avLst/>
@@ -20384,13 +20432,13 @@
               </a:lnSpc>
             </a:pPr>
             <a:r>
-              <a:rPr sz="1500" i="0" b="0">
+              <a:rPr sz="1600" i="0" b="0">
                 <a:solidFill>
                   <a:srgbClr val="E2E8F0"/>
                 </a:solidFill>
                 <a:latin typeface="Menlo"/>
               </a:rPr>
-              <a:t>KV bytes/token = 2 x n_layers x n_kv_heads x head_dim x bytes</a:t>
+              <a:t>bytes/token = 2 x layers x kv_heads</a:t>
             </a:r>
           </a:p>
           <a:p>
@@ -20399,6 +20447,15 @@
                 <a:spcPct val="100000"/>
               </a:lnSpc>
             </a:pPr>
+            <a:r>
+              <a:rPr sz="1600" i="0" b="0">
+                <a:solidFill>
+                  <a:srgbClr val="E2E8F0"/>
+                </a:solidFill>
+                <a:latin typeface="Menlo"/>
+              </a:rPr>
+              <a:t>                x head_dim x bytes</a:t>
+            </a:r>
           </a:p>
           <a:p>
             <a:pPr algn="l">
@@ -20406,14 +20463,21 @@
                 <a:spcPct val="100000"/>
               </a:lnSpc>
             </a:pPr>
-            <a:r>
-              <a:rPr sz="1500" i="0" b="0">
+          </a:p>
+          <a:p>
+            <a:pPr algn="l">
+              <a:lnSpc>
+                <a:spcPct val="100000"/>
+              </a:lnSpc>
+            </a:pPr>
+            <a:r>
+              <a:rPr sz="1600" i="0" b="0">
                 <a:solidFill>
                   <a:srgbClr val="E2E8F0"/>
                 </a:solidFill>
                 <a:latin typeface="Menlo"/>
               </a:rPr>
-              <a:t>Llama 2 7B  (FP16, MHA)        0.5 MB/token; 1.07 GB at 2,048</a:t>
+              <a:t>Llama 2 7B,  FP16, MHA   0.5 MB/token</a:t>
             </a:r>
           </a:p>
           <a:p>
@@ -20423,13 +20487,13 @@
               </a:lnSpc>
             </a:pPr>
             <a:r>
-              <a:rPr sz="1500" i="0" b="0">
+              <a:rPr sz="1600" i="0" b="0">
                 <a:solidFill>
                   <a:srgbClr val="E2E8F0"/>
                 </a:solidFill>
                 <a:latin typeface="Menlo"/>
               </a:rPr>
-              <a:t>Llama 2 13B (FP16, MHA)        0.82 MB/token; 3.36 GB at 4,096</a:t>
+              <a:t>  1.07 GB at 2,048 tokens</a:t>
             </a:r>
           </a:p>
           <a:p>
@@ -20439,13 +20503,13 @@
               </a:lnSpc>
             </a:pPr>
             <a:r>
-              <a:rPr sz="1500" i="0" b="0">
+              <a:rPr sz="1600" i="0" b="0">
                 <a:solidFill>
                   <a:srgbClr val="E2E8F0"/>
                 </a:solidFill>
                 <a:latin typeface="Menlo"/>
               </a:rPr>
-              <a:t>  same, with GQA-8             0.67 GB</a:t>
+              <a:t>Llama 2 13B, FP16, MHA   0.82 MB/token</a:t>
             </a:r>
           </a:p>
           <a:p>
@@ -20455,13 +20519,13 @@
               </a:lnSpc>
             </a:pPr>
             <a:r>
-              <a:rPr sz="1500" i="0" b="0">
+              <a:rPr sz="1600" i="0" b="0">
                 <a:solidFill>
                   <a:srgbClr val="E2E8F0"/>
                 </a:solidFill>
                 <a:latin typeface="Menlo"/>
               </a:rPr>
-              <a:t>  same, with MQA               0.084 GB</a:t>
+              <a:t>  3.36 GB at 4,096 tokens</a:t>
             </a:r>
           </a:p>
           <a:p>
@@ -20470,6 +20534,15 @@
                 <a:spcPct val="100000"/>
               </a:lnSpc>
             </a:pPr>
+            <a:r>
+              <a:rPr sz="1600" i="0" b="0">
+                <a:solidFill>
+                  <a:srgbClr val="E2E8F0"/>
+                </a:solidFill>
+                <a:latin typeface="Menlo"/>
+              </a:rPr>
+              <a:t>  GQA-8 0.67 GB, MQA 0.084 GB</a:t>
+            </a:r>
           </a:p>
           <a:p>
             <a:pPr algn="l">
@@ -20477,14 +20550,21 @@
                 <a:spcPct val="100000"/>
               </a:lnSpc>
             </a:pPr>
-            <a:r>
-              <a:rPr sz="1500" i="0" b="0">
+          </a:p>
+          <a:p>
+            <a:pPr algn="l">
+              <a:lnSpc>
+                <a:spcPct val="100000"/>
+              </a:lnSpc>
+            </a:pPr>
+            <a:r>
+              <a:rPr sz="1600" i="0" b="0">
                 <a:solidFill>
                   <a:srgbClr val="E2E8F0"/>
                 </a:solidFill>
                 <a:latin typeface="Menlo"/>
               </a:rPr>
-              <a:t>500B+ MHA, batch 512, 2,048    ~3 TB, 3x the weights</a:t>
+              <a:t>500B+ MHA, batch 512, 2,048: ~3 TB</a:t>
             </a:r>
           </a:p>
           <a:p>
@@ -20494,13 +20574,13 @@
               </a:lnSpc>
             </a:pPr>
             <a:r>
-              <a:rPr sz="1500" i="0" b="0">
+              <a:rPr sz="1600" i="0" b="0">
                 <a:solidFill>
                   <a:srgbClr val="E2E8F0"/>
                 </a:solidFill>
                 <a:latin typeface="Menlo"/>
               </a:rPr>
-              <a:t>Budget: 70 GB weights on 180 GB usable = about 110 GB of KV</a:t>
+              <a:t>70 GB weights on 180 GB: ~110 GB for KV</a:t>
             </a:r>
           </a:p>
         </p:txBody>
@@ -28092,7 +28172,7 @@
       </p:sp>
       <p:pic>
         <p:nvPicPr>
-          <p:cNvPr id="13" name="Picture 12" descr="huyen-ai-engineering-fig9-14-4955977119007728190.jpg"/>
+          <p:cNvPr id="13" name="Picture 12" descr="huyen-ai-engineering-fig9-14-7168118058761144686.jpg"/>
           <p:cNvPicPr>
             <a:picLocks noChangeAspect="1"/>
           </p:cNvPicPr>
@@ -30504,7 +30584,7 @@
                 </a:solidFill>
                 <a:latin typeface="Helvetica Neue"/>
               </a:rPr>
-              <a:t>, ECC on.</a:t>
+              <a:t>.</a:t>
             </a:r>
           </a:p>
         </p:txBody>
@@ -34366,161 +34446,16 @@
           </a:p>
         </p:txBody>
       </p:sp>
-      <p:cxnSp>
-        <p:nvCxnSpPr>
-          <p:cNvPr id="21" name="Connector 20"/>
-          <p:cNvCxnSpPr/>
-          <p:nvPr/>
-        </p:nvCxnSpPr>
-        <p:spPr>
-          <a:xfrm>
-            <a:off x="8976207" y="3718560"/>
-            <a:ext cx="0" cy="411480"/>
-          </a:xfrm>
-          <a:prstGeom prst="line">
-            <a:avLst/>
-          </a:prstGeom>
-          <a:ln w="22225">
-            <a:solidFill>
-              <a:srgbClr val="166534"/>
-            </a:solidFill>
-          </a:ln>
-        </p:spPr>
-        <p:style>
-          <a:lnRef idx="2">
-            <a:schemeClr val="accent1"/>
-          </a:lnRef>
-          <a:fillRef idx="0">
-            <a:schemeClr val="accent1"/>
-          </a:fillRef>
-          <a:effectRef idx="1">
-            <a:schemeClr val="accent1"/>
-          </a:effectRef>
-          <a:fontRef idx="minor">
-            <a:schemeClr val="tx1"/>
-          </a:fontRef>
-        </p:style>
-      </p:cxnSp>
-      <p:cxnSp>
-        <p:nvCxnSpPr>
-          <p:cNvPr id="22" name="Connector 21"/>
-          <p:cNvCxnSpPr/>
-          <p:nvPr/>
-        </p:nvCxnSpPr>
-        <p:spPr>
-          <a:xfrm flipH="1">
-            <a:off x="3215487" y="4130040"/>
-            <a:ext cx="5760720" cy="0"/>
-          </a:xfrm>
-          <a:prstGeom prst="line">
-            <a:avLst/>
-          </a:prstGeom>
-          <a:ln w="22225">
-            <a:solidFill>
-              <a:srgbClr val="166534"/>
-            </a:solidFill>
-          </a:ln>
-        </p:spPr>
-        <p:style>
-          <a:lnRef idx="2">
-            <a:schemeClr val="accent1"/>
-          </a:lnRef>
-          <a:fillRef idx="0">
-            <a:schemeClr val="accent1"/>
-          </a:fillRef>
-          <a:effectRef idx="1">
-            <a:schemeClr val="accent1"/>
-          </a:effectRef>
-          <a:fontRef idx="minor">
-            <a:schemeClr val="tx1"/>
-          </a:fontRef>
-        </p:style>
-      </p:cxnSp>
-      <p:cxnSp>
-        <p:nvCxnSpPr>
-          <p:cNvPr id="23" name="Connector 22"/>
-          <p:cNvCxnSpPr/>
-          <p:nvPr/>
-        </p:nvCxnSpPr>
-        <p:spPr>
-          <a:xfrm flipV="1">
-            <a:off x="3215487" y="3755136"/>
-            <a:ext cx="0" cy="374904"/>
-          </a:xfrm>
-          <a:prstGeom prst="line">
-            <a:avLst/>
-          </a:prstGeom>
-          <a:ln w="22225">
-            <a:solidFill>
-              <a:srgbClr val="166534"/>
-            </a:solidFill>
-            <a:tailEnd type="triangle" w="med" len="med"/>
-          </a:ln>
-        </p:spPr>
-        <p:style>
-          <a:lnRef idx="2">
-            <a:schemeClr val="accent1"/>
-          </a:lnRef>
-          <a:fillRef idx="0">
-            <a:schemeClr val="accent1"/>
-          </a:fillRef>
-          <a:effectRef idx="1">
-            <a:schemeClr val="accent1"/>
-          </a:effectRef>
-          <a:fontRef idx="minor">
-            <a:schemeClr val="tx1"/>
-          </a:fontRef>
-        </p:style>
-      </p:cxnSp>
-      <p:sp>
-        <p:nvSpPr>
-          <p:cNvPr id="24" name="TextBox 23"/>
+      <p:sp>
+        <p:nvSpPr>
+          <p:cNvPr id="21" name="TextBox 20"/>
           <p:cNvSpPr txBox="1"/>
           <p:nvPr/>
         </p:nvSpPr>
         <p:spPr>
           <a:xfrm>
-            <a:off x="3215487" y="4166616"/>
-            <a:ext cx="5760720" cy="320040"/>
-          </a:xfrm>
-          <a:prstGeom prst="rect">
-            <a:avLst/>
-          </a:prstGeom>
-          <a:noFill/>
-        </p:spPr>
-        <p:txBody>
-          <a:bodyPr wrap="square" lIns="0" rIns="0" tIns="0" bIns="0" anchor="t">
-            <a:noAutofit/>
-          </a:bodyPr>
-          <a:lstStyle/>
-          <a:p>
-            <a:pPr algn="ctr">
-              <a:lnSpc>
-                <a:spcPct val="110000"/>
-              </a:lnSpc>
-            </a:pPr>
-            <a:r>
-              <a:rPr sz="1300" i="1" b="0">
-                <a:solidFill>
-                  <a:srgbClr val="166534"/>
-                </a:solidFill>
-                <a:latin typeface="Helvetica Neue"/>
-              </a:rPr>
-              <a:t>repeat per output token</a:t>
-            </a:r>
-          </a:p>
-        </p:txBody>
-      </p:sp>
-      <p:sp>
-        <p:nvSpPr>
-          <p:cNvPr id="25" name="TextBox 24"/>
-          <p:cNvSpPr txBox="1"/>
-          <p:nvPr/>
-        </p:nvSpPr>
-        <p:spPr>
-          <a:xfrm>
-            <a:off x="502920" y="4861560"/>
-            <a:ext cx="11185855" cy="624839"/>
+            <a:off x="502920" y="4038600"/>
+            <a:ext cx="11185855" cy="1447799"/>
           </a:xfrm>
           <a:prstGeom prst="rect">
             <a:avLst/>
@@ -35036,7 +34971,7 @@
         <p:spPr>
           <a:xfrm>
             <a:off x="502920" y="1472184"/>
-            <a:ext cx="6711513" cy="3124200"/>
+            <a:ext cx="6711513" cy="2880360"/>
           </a:xfrm>
           <a:prstGeom prst="roundRect">
             <a:avLst>
@@ -35121,7 +35056,7 @@
         <p:spPr>
           <a:xfrm>
             <a:off x="731520" y="1883664"/>
-            <a:ext cx="6254313" cy="2484119"/>
+            <a:ext cx="6254313" cy="2240279"/>
           </a:xfrm>
           <a:prstGeom prst="rect">
             <a:avLst/>
@@ -35162,7 +35097,7 @@
                 </a:solidFill>
                 <a:latin typeface="Menlo"/>
               </a:rPr>
-              <a:t>$2/hour at 100 output tokens/s      = $5.56 per million output tokens</a:t>
+              <a:t>$2/hour at 100 output tok/s = $5.56 per M tok</a:t>
             </a:r>
           </a:p>
           <a:p>
@@ -35178,7 +35113,7 @@
                 </a:solidFill>
                 <a:latin typeface="Menlo"/>
               </a:rPr>
-              <a:t>1,000 requests x 200 output tokens  = $1.11 decode</a:t>
+              <a:t>1,000 requests x 200 tokens = $1.11 decode</a:t>
             </a:r>
           </a:p>
           <a:p>
@@ -35194,7 +35129,7 @@
                 </a:solidFill>
                 <a:latin typeface="Menlo"/>
               </a:rPr>
-              <a:t>prefill at 100 requests/minute      = $0.33</a:t>
+              <a:t>prefill, 100 requests/min   = $0.33</a:t>
             </a:r>
           </a:p>
           <a:p>
@@ -35210,7 +35145,7 @@
                 </a:solidFill>
                 <a:latin typeface="Menlo"/>
               </a:rPr>
-              <a:t>total                               = $1.44</a:t>
+              <a:t>total                       = $1.44</a:t>
             </a:r>
           </a:p>
           <a:p>
@@ -35249,7 +35184,7 @@
                 </a:solidFill>
                 <a:latin typeface="Menlo"/>
               </a:rPr>
-              <a:t>7B x 2 bytes x 100                  = 700 GB/s</a:t>
+              <a:t>7B x 2 bytes x 100          = 700 GB/s</a:t>
             </a:r>
           </a:p>
           <a:p>
@@ -35265,7 +35200,7 @@
                 </a:solidFill>
                 <a:latin typeface="Menlo"/>
               </a:rPr>
-              <a:t>A100 rated at 2 TB/s                = 70% MBU</a:t>
+              <a:t>A100 rated at 2 TB/s        = 70% MBU</a:t>
             </a:r>
           </a:p>
         </p:txBody>
